--- a/湿地语义分割研究进展_v4-v9_20260731.pptx
+++ b/湿地语义分割研究进展_v4-v9_20260731.pptx
@@ -3396,7 +3396,7 @@
                 <a:ea typeface="微软雅黑" pitchFamily="34" charset="-122"/>
                 <a:cs typeface="微软雅黑" pitchFamily="34" charset="-120"/>
               </a:rPr>
-              <a:t>分歧→人标  /  一致→机标：在 147 标注 vs 1278 未标注 下最大化标注预算效率，可迁移至遥感/医学等标注稀缺场景</a:t>
+              <a:t>分歧→人标  /  一致→机标：在 225 已精修 vs 1278 未标注 下最大化标注预算效率，可迁移至遥感/医学等标注稀缺场景</a:t>
             </a:r>
             <a:endParaRPr lang="en-US" sz="1050" dirty="0"/>
           </a:p>
@@ -5382,7 +5382,7 @@
                 <a:ea typeface="微软雅黑" pitchFamily="34" charset="-122"/>
                 <a:cs typeface="微软雅黑" pitchFamily="34" charset="-120"/>
               </a:rPr>
-              <a:t>数据不平衡：仅 147 已标注，1278 未标注待利用</a:t>
+              <a:t>数据不平衡：已精修 225 样本，1278 未标注待利用</a:t>
             </a:r>
             <a:endParaRPr lang="en-US" sz="1250" dirty="0"/>
           </a:p>
@@ -5731,7 +5731,7 @@
                 <a:ea typeface="微软雅黑" pitchFamily="34" charset="-122"/>
                 <a:cs typeface="微软雅黑" pitchFamily="34" charset="-120"/>
               </a:rPr>
-              <a:t>147</a:t>
+              <a:t>225</a:t>
             </a:r>
             <a:endParaRPr lang="en-US" sz="2600" dirty="0"/>
           </a:p>
@@ -5770,7 +5770,7 @@
                 <a:ea typeface="微软雅黑" pitchFamily="34" charset="-122"/>
                 <a:cs typeface="微软雅黑" pitchFamily="34" charset="-120"/>
               </a:rPr>
-              <a:t>已标注样本</a:t>
+              <a:t>已精修样本</a:t>
             </a:r>
             <a:endParaRPr lang="en-US" sz="1050" dirty="0"/>
           </a:p>
